--- a/artifacts/editorial_accent_20261022/pptx/Figure15_Accent.pptx
+++ b/artifacts/editorial_accent_20261022/pptx/Figure15_Accent.pptx
@@ -1099,7 +1099,7 @@
                   <ns7:solidFill>
                     <ns7:srgbClr val="222222"/>
                   </ns7:solidFill>
-                  <ns7:latin typeface="Comic Sans MS"/>
+                  <ns7:latin typeface="Times New Roman"/>
                   <ns7:ea typeface="Times New Roman"/>
                 </ns7:rPr>
                 <ns7:t>Open question</ns7:t>
@@ -1136,7 +1136,7 @@
                   <ns7:solidFill>
                     <ns7:srgbClr val="222222"/>
                   </ns7:solidFill>
-                  <ns7:latin typeface="Comic Sans MS"/>
+                  <ns7:latin typeface="Times New Roman"/>
                   <ns7:ea typeface="Times New Roman"/>
                 </ns7:rPr>
                 <ns7:t>Controlled comparison</ns7:t>
@@ -1173,7 +1173,7 @@
                   <ns7:solidFill>
                     <ns7:srgbClr val="222222"/>
                   </ns7:solidFill>
-                  <ns7:latin typeface="Comic Sans MS"/>
+                  <ns7:latin typeface="Times New Roman"/>
                   <ns7:ea typeface="Times New Roman"/>
                 </ns7:rPr>
                 <ns7:t>Evidence to record</ns7:t>
@@ -1216,6 +1216,10 @@
               </ns4:solidFill>
             </ns4:ln>
           </p:spPr>
+          <p:txBody xmlns:a="http://schemas.openxmlformats.org/drawingml/2006/main">
+            <a:bodyPr/>
+            <a:p/>
+          </p:txBody>
         </p:sp>
         <p:sp>
           <p:nvSpPr>
@@ -1246,7 +1250,7 @@
                   <ns7:solidFill>
                     <ns7:srgbClr val="222222"/>
                   </ns7:solidFill>
-                  <ns7:latin typeface="Comic Sans MS"/>
+                  <ns7:latin typeface="Times New Roman"/>
                   <ns7:ea typeface="Times New Roman"/>
                 </ns7:rPr>
                 <ns7:t>Perception or execution</ns7:t>
@@ -1283,7 +1287,7 @@
                   <ns7:solidFill>
                     <ns7:srgbClr val="222222"/>
                   </ns7:solidFill>
-                  <ns7:latin typeface="Arial"/>
+                  <ns7:latin typeface="Times New Roman"/>
                   <ns7:ea typeface="Times New Roman"/>
                 </ns7:rPr>
                 <ns7:t>Numerical error</ns7:t>
@@ -1296,7 +1300,7 @@
                   <ns8:solidFill>
                     <ns8:srgbClr val="222222"/>
                   </ns8:solidFill>
-                  <ns8:latin typeface="Arial"/>
+                  <ns8:latin typeface="Times New Roman"/>
                   <ns8:ea typeface="Times New Roman"/>
                 </ns8:rPr>
                 <ns8:t>Execution cost</ns8:t>
@@ -1370,6 +1374,10 @@
                   </ns4:solidFill>
                 </ns4:ln>
               </p:spPr>
+              <p:txBody xmlns:a="http://schemas.openxmlformats.org/drawingml/2006/main">
+                <a:bodyPr/>
+                <a:p/>
+              </p:txBody>
             </p:sp>
             <p:sp>
               <p:nvSpPr>
@@ -1392,6 +1400,10 @@
                   </ns5:solidFill>
                 </ns5:ln>
               </p:spPr>
+              <p:txBody xmlns:a="http://schemas.openxmlformats.org/drawingml/2006/main">
+                <a:bodyPr/>
+                <a:p/>
+              </p:txBody>
             </p:sp>
             <p:sp>
               <p:nvSpPr>
@@ -1428,6 +1440,10 @@
                   </ns4:solidFill>
                 </ns4:ln>
               </p:spPr>
+              <p:txBody xmlns:a="http://schemas.openxmlformats.org/drawingml/2006/main">
+                <a:bodyPr/>
+                <a:p/>
+              </p:txBody>
             </p:sp>
             <p:sp>
               <p:nvSpPr>
@@ -1464,6 +1480,10 @@
                   </ns4:solidFill>
                 </ns4:ln>
               </p:spPr>
+              <p:txBody xmlns:a="http://schemas.openxmlformats.org/drawingml/2006/main">
+                <a:bodyPr/>
+                <a:p/>
+              </p:txBody>
             </p:sp>
             <p:sp>
               <p:nvSpPr>
@@ -1500,6 +1520,10 @@
                   </ns4:solidFill>
                 </ns4:ln>
               </p:spPr>
+              <p:txBody xmlns:a="http://schemas.openxmlformats.org/drawingml/2006/main">
+                <a:bodyPr/>
+                <a:p/>
+              </p:txBody>
             </p:sp>
             <p:sp>
               <p:nvSpPr>
@@ -1536,6 +1560,10 @@
                   </ns4:solidFill>
                 </ns4:ln>
               </p:spPr>
+              <p:txBody xmlns:a="http://schemas.openxmlformats.org/drawingml/2006/main">
+                <a:bodyPr/>
+                <a:p/>
+              </p:txBody>
             </p:sp>
           </p:grpSp>
           <p:sp>
@@ -1567,7 +1595,7 @@
                     <ns7:solidFill>
                       <ns7:srgbClr val="222222"/>
                     </ns7:solidFill>
-                    <ns7:latin typeface="Arial"/>
+                    <ns7:latin typeface="Times New Roman"/>
                     <ns7:ea typeface="Times New Roman"/>
                   </ns7:rPr>
                   <ns7:t>Model judgment</ns7:t>
@@ -1604,7 +1632,7 @@
                     <ns7:solidFill>
                       <ns7:srgbClr val="222222"/>
                     </ns7:solidFill>
-                    <ns7:latin typeface="Arial"/>
+                    <ns7:latin typeface="Times New Roman"/>
                     <ns7:ea typeface="Times New Roman"/>
                   </ns7:rPr>
                   <ns7:t>vs.</ns7:t>
@@ -1647,6 +1675,10 @@
                   </ns5:solidFill>
                 </ns5:ln>
               </p:spPr>
+              <p:txBody xmlns:a="http://schemas.openxmlformats.org/drawingml/2006/main">
+                <a:bodyPr/>
+                <a:p/>
+              </p:txBody>
             </p:sp>
             <p:sp>
               <p:nvSpPr>
@@ -1683,6 +1715,10 @@
                   </ns4:solidFill>
                 </ns4:ln>
               </p:spPr>
+              <p:txBody xmlns:a="http://schemas.openxmlformats.org/drawingml/2006/main">
+                <a:bodyPr/>
+                <a:p/>
+              </p:txBody>
             </p:sp>
             <p:sp>
               <p:nvSpPr>
@@ -1719,6 +1755,10 @@
                   </ns4:solidFill>
                 </ns4:ln>
               </p:spPr>
+              <p:txBody xmlns:a="http://schemas.openxmlformats.org/drawingml/2006/main">
+                <a:bodyPr/>
+                <a:p/>
+              </p:txBody>
             </p:sp>
             <p:sp>
               <p:nvSpPr>
@@ -1755,6 +1795,10 @@
                   </ns4:solidFill>
                 </ns4:ln>
               </p:spPr>
+              <p:txBody xmlns:a="http://schemas.openxmlformats.org/drawingml/2006/main">
+                <a:bodyPr/>
+                <a:p/>
+              </p:txBody>
             </p:sp>
             <p:sp>
               <p:nvSpPr>
@@ -1791,6 +1835,10 @@
                   </ns4:solidFill>
                 </ns4:ln>
               </p:spPr>
+              <p:txBody xmlns:a="http://schemas.openxmlformats.org/drawingml/2006/main">
+                <a:bodyPr/>
+                <a:p/>
+              </p:txBody>
             </p:sp>
             <p:sp>
               <p:nvSpPr>
@@ -1827,6 +1875,10 @@
                   </ns4:solidFill>
                 </ns4:ln>
               </p:spPr>
+              <p:txBody xmlns:a="http://schemas.openxmlformats.org/drawingml/2006/main">
+                <a:bodyPr/>
+                <a:p/>
+              </p:txBody>
             </p:sp>
             <p:sp>
               <p:nvSpPr>
@@ -1863,6 +1915,10 @@
                   </ns4:solidFill>
                 </ns4:ln>
               </p:spPr>
+              <p:txBody xmlns:a="http://schemas.openxmlformats.org/drawingml/2006/main">
+                <a:bodyPr/>
+                <a:p/>
+              </p:txBody>
             </p:sp>
             <p:sp>
               <p:nvSpPr>
@@ -1899,6 +1955,10 @@
                   </ns4:solidFill>
                 </ns4:ln>
               </p:spPr>
+              <p:txBody xmlns:a="http://schemas.openxmlformats.org/drawingml/2006/main">
+                <a:bodyPr/>
+                <a:p/>
+              </p:txBody>
             </p:sp>
             <p:sp>
               <p:nvSpPr>
@@ -1935,6 +1995,10 @@
                   </ns4:solidFill>
                 </ns4:ln>
               </p:spPr>
+              <p:txBody xmlns:a="http://schemas.openxmlformats.org/drawingml/2006/main">
+                <a:bodyPr/>
+                <a:p/>
+              </p:txBody>
             </p:sp>
             <p:sp>
               <p:nvSpPr>
@@ -1971,6 +2035,10 @@
                   </ns4:solidFill>
                 </ns4:ln>
               </p:spPr>
+              <p:txBody xmlns:a="http://schemas.openxmlformats.org/drawingml/2006/main">
+                <a:bodyPr/>
+                <a:p/>
+              </p:txBody>
             </p:sp>
           </p:grpSp>
           <p:sp>
@@ -2002,7 +2070,7 @@
                     <ns7:solidFill>
                       <ns7:srgbClr val="222222"/>
                     </ns7:solidFill>
-                    <ns7:latin typeface="Arial"/>
+                    <ns7:latin typeface="Times New Roman"/>
                     <ns7:ea typeface="Times New Roman"/>
                   </ns7:rPr>
                   <ns7:t>Numerical tool</ns7:t>
@@ -2046,6 +2114,10 @@
               </ns4:solidFill>
             </ns4:ln>
           </p:spPr>
+          <p:txBody xmlns:a="http://schemas.openxmlformats.org/drawingml/2006/main">
+            <a:bodyPr/>
+            <a:p/>
+          </p:txBody>
         </p:sp>
         <p:sp>
           <p:nvSpPr>
@@ -2076,7 +2148,7 @@
                   <ns7:solidFill>
                     <ns7:srgbClr val="222222"/>
                   </ns7:solidFill>
-                  <ns7:latin typeface="Comic Sans MS"/>
+                  <ns7:latin typeface="Times New Roman"/>
                   <ns7:ea typeface="Times New Roman"/>
                 </ns7:rPr>
                 <ns7:t>Memory under change</ns7:t>
@@ -2113,7 +2185,7 @@
                   <ns7:solidFill>
                     <ns7:srgbClr val="222222"/>
                   </ns7:solidFill>
-                  <ns7:latin typeface="Arial"/>
+                  <ns7:latin typeface="Times New Roman"/>
                   <ns7:ea typeface="Times New Roman"/>
                 </ns7:rPr>
                 <ns7:t>Revalidation</ns7:t>
@@ -2126,7 +2198,7 @@
                   <ns8:solidFill>
                     <ns8:srgbClr val="222222"/>
                   </ns8:solidFill>
-                  <ns8:latin typeface="Arial"/>
+                  <ns8:latin typeface="Times New Roman"/>
                   <ns8:ea typeface="Times New Roman"/>
                 </ns8:rPr>
                 <ns8:t>Updated conclusions</ns8:t>
@@ -2186,6 +2258,10 @@
                 </ns0:outerShdw>
               </ns0:effectLst>
             </p:spPr>
+            <p:txBody xmlns:a="http://schemas.openxmlformats.org/drawingml/2006/main">
+              <a:bodyPr/>
+              <a:p/>
+            </p:txBody>
           </p:sp>
           <p:sp>
             <p:nvSpPr>
@@ -2216,7 +2292,7 @@
                     <ns7:solidFill>
                       <ns7:srgbClr val="222222"/>
                     </ns7:solidFill>
-                    <ns7:latin typeface="Arial"/>
+                    <ns7:latin typeface="Times New Roman"/>
                     <ns7:ea typeface="Times New Roman"/>
                   </ns7:rPr>
                   <ns7:t>Release v₁</ns7:t>
@@ -2253,7 +2329,7 @@
                     <ns7:solidFill>
                       <ns7:srgbClr val="222222"/>
                     </ns7:solidFill>
-                    <ns7:latin typeface="Arial"/>
+                    <ns7:latin typeface="Times New Roman"/>
                     <ns7:ea typeface="Times New Roman"/>
                   </ns7:rPr>
                   <ns7:t>Prior evidence</ns7:t>
@@ -2312,6 +2388,10 @@
                 </ns0:outerShdw>
               </ns0:effectLst>
             </p:spPr>
+            <p:txBody xmlns:a="http://schemas.openxmlformats.org/drawingml/2006/main">
+              <a:bodyPr/>
+              <a:p/>
+            </p:txBody>
           </p:sp>
           <p:sp>
             <p:nvSpPr>
@@ -2351,6 +2431,10 @@
                 </ns1:outerShdw>
               </ns1:effectLst>
             </p:spPr>
+            <p:txBody xmlns:a="http://schemas.openxmlformats.org/drawingml/2006/main">
+              <a:bodyPr/>
+              <a:p/>
+            </p:txBody>
           </p:sp>
           <p:sp>
             <p:nvSpPr>
@@ -2381,7 +2465,7 @@
                     <ns7:solidFill>
                       <ns7:srgbClr val="222222"/>
                     </ns7:solidFill>
-                    <ns7:latin typeface="Arial"/>
+                    <ns7:latin typeface="Times New Roman"/>
                     <ns7:ea typeface="Times New Roman"/>
                   </ns7:rPr>
                   <ns7:t>Release v₂</ns7:t>
@@ -2418,7 +2502,7 @@
                     <ns7:solidFill>
                       <ns7:srgbClr val="222222"/>
                     </ns7:solidFill>
-                    <ns7:latin typeface="Arial"/>
+                    <ns7:latin typeface="Times New Roman"/>
                     <ns7:ea typeface="Times New Roman"/>
                   </ns7:rPr>
                   <ns7:t>Revised values</ns7:t>
@@ -2462,6 +2546,10 @@
               </ns4:solidFill>
             </ns4:ln>
           </p:spPr>
+          <p:txBody xmlns:a="http://schemas.openxmlformats.org/drawingml/2006/main">
+            <a:bodyPr/>
+            <a:p/>
+          </p:txBody>
         </p:sp>
         <p:sp>
           <p:nvSpPr>
@@ -2492,7 +2580,7 @@
                   <ns7:solidFill>
                     <ns7:srgbClr val="222222"/>
                   </ns7:solidFill>
-                  <ns7:latin typeface="Comic Sans MS"/>
+                  <ns7:latin typeface="Times New Roman"/>
                   <ns7:ea typeface="Times New Roman"/>
                 </ns7:rPr>
                 <ns7:t>Procedure transfer</ns7:t>
@@ -2529,7 +2617,7 @@
                   <ns7:solidFill>
                     <ns7:srgbClr val="222222"/>
                   </ns7:solidFill>
-                  <ns7:latin typeface="Arial"/>
+                  <ns7:latin typeface="Times New Roman"/>
                   <ns7:ea typeface="Times New Roman"/>
                 </ns7:rPr>
                 <ns7:t>Held-out performance</ns7:t>
@@ -2542,7 +2630,7 @@
                   <ns8:solidFill>
                     <ns8:srgbClr val="222222"/>
                   </ns8:solidFill>
-                  <ns8:latin typeface="Arial"/>
+                  <ns8:latin typeface="Times New Roman"/>
                   <ns8:ea typeface="Times New Roman"/>
                 </ns8:rPr>
                 <ns8:t>Reuse success</ns8:t>
@@ -2611,6 +2699,10 @@
                 <ns4:tailEnd type="triangle" w="med" len="med"/>
               </ns4:ln>
             </p:spPr>
+            <p:txBody xmlns:a="http://schemas.openxmlformats.org/drawingml/2006/main">
+              <a:bodyPr/>
+              <a:p/>
+            </p:txBody>
           </p:sp>
           <p:sp>
             <p:nvSpPr>
@@ -2680,6 +2772,10 @@
                 </ns4:solidFill>
               </ns4:ln>
             </p:spPr>
+            <p:txBody xmlns:a="http://schemas.openxmlformats.org/drawingml/2006/main">
+              <a:bodyPr/>
+              <a:p/>
+            </p:txBody>
           </p:sp>
           <p:sp>
             <p:nvSpPr>
@@ -2710,7 +2806,7 @@
                     <ns7:solidFill>
                       <ns7:srgbClr val="222222"/>
                     </ns7:solidFill>
-                    <ns7:latin typeface="Arial"/>
+                    <ns7:latin typeface="Times New Roman"/>
                     <ns7:ea typeface="Times New Roman"/>
                   </ns7:rPr>
                   <ns7:t>Seen setting</ns7:t>
@@ -2747,7 +2843,7 @@
                     <ns7:solidFill>
                       <ns7:srgbClr val="222222"/>
                     </ns7:solidFill>
-                    <ns7:latin typeface="Arial"/>
+                    <ns7:latin typeface="Times New Roman"/>
                     <ns7:ea typeface="Times New Roman"/>
                   </ns7:rPr>
                   <ns7:t>vs.</ns7:t>
@@ -2802,6 +2898,10 @@
                 <ns4:tailEnd type="triangle" w="med" len="med"/>
               </ns4:ln>
             </p:spPr>
+            <p:txBody xmlns:a="http://schemas.openxmlformats.org/drawingml/2006/main">
+              <a:bodyPr/>
+              <a:p/>
+            </p:txBody>
           </p:sp>
           <p:sp>
             <p:nvSpPr>
@@ -2871,6 +2971,10 @@
                 </ns4:solidFill>
               </ns4:ln>
             </p:spPr>
+            <p:txBody xmlns:a="http://schemas.openxmlformats.org/drawingml/2006/main">
+              <a:bodyPr/>
+              <a:p/>
+            </p:txBody>
           </p:sp>
           <p:sp>
             <p:nvSpPr>
@@ -2901,7 +3005,7 @@
                     <ns7:solidFill>
                       <ns7:srgbClr val="222222"/>
                     </ns7:solidFill>
-                    <ns7:latin typeface="Arial"/>
+                    <ns7:latin typeface="Times New Roman"/>
                     <ns7:ea typeface="Times New Roman"/>
                   </ns7:rPr>
                   <ns7:t>Held-out setting</ns7:t>
@@ -2945,6 +3049,10 @@
               </ns4:solidFill>
             </ns4:ln>
           </p:spPr>
+          <p:txBody xmlns:a="http://schemas.openxmlformats.org/drawingml/2006/main">
+            <a:bodyPr/>
+            <a:p/>
+          </p:txBody>
         </p:sp>
         <p:sp>
           <p:nvSpPr>
@@ -2975,7 +3083,7 @@
                   <ns7:solidFill>
                     <ns7:srgbClr val="222222"/>
                   </ns7:solidFill>
-                  <ns7:latin typeface="Comic Sans MS"/>
+                  <ns7:latin typeface="Times New Roman"/>
                   <ns7:ea typeface="Times New Roman"/>
                 </ns7:rPr>
                 <ns7:t>Evidence sensitivity</ns7:t>
@@ -3012,7 +3120,7 @@
                   <ns7:solidFill>
                     <ns7:srgbClr val="222222"/>
                   </ns7:solidFill>
-                  <ns7:latin typeface="Arial"/>
+                  <ns7:latin typeface="Times New Roman"/>
                   <ns7:ea typeface="Times New Roman"/>
                 </ns7:rPr>
                 <ns7:t>Response to removal</ns7:t>
@@ -3025,7 +3133,7 @@
                   <ns8:solidFill>
                     <ns8:srgbClr val="222222"/>
                   </ns8:solidFill>
-                  <ns8:latin typeface="Arial"/>
+                  <ns8:latin typeface="Times New Roman"/>
                   <ns8:ea typeface="Times New Roman"/>
                 </ns8:rPr>
                 <ns8:t>Grounded claims</ns8:t>
@@ -3134,6 +3242,10 @@
                   </ns4:solidFill>
                 </ns4:ln>
               </p:spPr>
+              <p:txBody xmlns:a="http://schemas.openxmlformats.org/drawingml/2006/main">
+                <a:bodyPr/>
+                <a:p/>
+              </p:txBody>
             </p:sp>
             <p:sp>
               <p:nvSpPr>
@@ -3178,6 +3290,10 @@
                   </ns4:solidFill>
                 </ns4:ln>
               </p:spPr>
+              <p:txBody xmlns:a="http://schemas.openxmlformats.org/drawingml/2006/main">
+                <a:bodyPr/>
+                <a:p/>
+              </p:txBody>
             </p:sp>
             <p:sp>
               <p:nvSpPr>
@@ -3214,6 +3330,10 @@
                   </ns4:solidFill>
                 </ns4:ln>
               </p:spPr>
+              <p:txBody xmlns:a="http://schemas.openxmlformats.org/drawingml/2006/main">
+                <a:bodyPr/>
+                <a:p/>
+              </p:txBody>
             </p:sp>
             <p:sp>
               <p:nvSpPr>
@@ -3250,6 +3370,10 @@
                   </ns4:solidFill>
                 </ns4:ln>
               </p:spPr>
+              <p:txBody xmlns:a="http://schemas.openxmlformats.org/drawingml/2006/main">
+                <a:bodyPr/>
+                <a:p/>
+              </p:txBody>
             </p:sp>
             <p:sp>
               <p:nvSpPr>
@@ -3286,6 +3410,10 @@
                   </ns4:solidFill>
                 </ns4:ln>
               </p:spPr>
+              <p:txBody xmlns:a="http://schemas.openxmlformats.org/drawingml/2006/main">
+                <a:bodyPr/>
+                <a:p/>
+              </p:txBody>
             </p:sp>
           </p:grpSp>
           <p:grpSp>
@@ -3340,6 +3468,10 @@
                   </ns4:solidFill>
                 </ns4:ln>
               </p:spPr>
+              <p:txBody xmlns:a="http://schemas.openxmlformats.org/drawingml/2006/main">
+                <a:bodyPr/>
+                <a:p/>
+              </p:txBody>
             </p:sp>
           </p:grpSp>
           <p:sp>
@@ -3371,7 +3503,7 @@
                     <ns7:solidFill>
                       <ns7:srgbClr val="222222"/>
                     </ns7:solidFill>
-                    <ns7:latin typeface="Arial"/>
+                    <ns7:latin typeface="Times New Roman"/>
                     <ns7:ea typeface="Times New Roman"/>
                   </ns7:rPr>
                   <ns7:t>Evidence present</ns7:t>
@@ -3408,7 +3540,7 @@
                     <ns7:solidFill>
                       <ns7:srgbClr val="222222"/>
                     </ns7:solidFill>
-                    <ns7:latin typeface="Arial"/>
+                    <ns7:latin typeface="Times New Roman"/>
                     <ns7:ea typeface="Times New Roman"/>
                   </ns7:rPr>
                   <ns7:t>vs.</ns7:t>
@@ -3503,6 +3635,10 @@
                   </ns4:solidFill>
                 </ns4:ln>
               </p:spPr>
+              <p:txBody xmlns:a="http://schemas.openxmlformats.org/drawingml/2006/main">
+                <a:bodyPr/>
+                <a:p/>
+              </p:txBody>
             </p:sp>
             <p:sp>
               <p:nvSpPr>
@@ -3547,6 +3683,10 @@
                   </ns4:solidFill>
                 </ns4:ln>
               </p:spPr>
+              <p:txBody xmlns:a="http://schemas.openxmlformats.org/drawingml/2006/main">
+                <a:bodyPr/>
+                <a:p/>
+              </p:txBody>
             </p:sp>
             <p:sp>
               <p:nvSpPr>
@@ -3583,6 +3723,10 @@
                   </ns4:solidFill>
                 </ns4:ln>
               </p:spPr>
+              <p:txBody xmlns:a="http://schemas.openxmlformats.org/drawingml/2006/main">
+                <a:bodyPr/>
+                <a:p/>
+              </p:txBody>
             </p:sp>
             <p:sp>
               <p:nvSpPr>
@@ -3619,6 +3763,10 @@
                   </ns4:solidFill>
                 </ns4:ln>
               </p:spPr>
+              <p:txBody xmlns:a="http://schemas.openxmlformats.org/drawingml/2006/main">
+                <a:bodyPr/>
+                <a:p/>
+              </p:txBody>
             </p:sp>
             <p:sp>
               <p:nvSpPr>
@@ -3655,6 +3803,10 @@
                   </ns4:solidFill>
                 </ns4:ln>
               </p:spPr>
+              <p:txBody xmlns:a="http://schemas.openxmlformats.org/drawingml/2006/main">
+                <a:bodyPr/>
+                <a:p/>
+              </p:txBody>
             </p:sp>
           </p:grpSp>
           <p:grpSp>
@@ -3706,6 +3858,10 @@
                   </ns4:solidFill>
                 </ns4:ln>
               </p:spPr>
+              <p:txBody xmlns:a="http://schemas.openxmlformats.org/drawingml/2006/main">
+                <a:bodyPr/>
+                <a:p/>
+              </p:txBody>
             </p:sp>
             <p:sp>
               <p:nvSpPr>
@@ -3742,6 +3898,10 @@
                   </ns4:solidFill>
                 </ns4:ln>
               </p:spPr>
+              <p:txBody xmlns:a="http://schemas.openxmlformats.org/drawingml/2006/main">
+                <a:bodyPr/>
+                <a:p/>
+              </p:txBody>
             </p:sp>
           </p:grpSp>
           <p:sp>
@@ -3773,7 +3933,7 @@
                     <ns7:solidFill>
                       <ns7:srgbClr val="222222"/>
                     </ns7:solidFill>
-                    <ns7:latin typeface="Arial"/>
+                    <ns7:latin typeface="Times New Roman"/>
                     <ns7:ea typeface="Times New Roman"/>
                   </ns7:rPr>
                   <ns7:t>Evidence removed</ns7:t>
@@ -3817,6 +3977,10 @@
               </ns4:solidFill>
             </ns4:ln>
           </p:spPr>
+          <p:txBody xmlns:a="http://schemas.openxmlformats.org/drawingml/2006/main">
+            <a:bodyPr/>
+            <a:p/>
+          </p:txBody>
         </p:sp>
         <p:sp>
           <p:nvSpPr>
@@ -3847,7 +4011,7 @@
                   <ns7:solidFill>
                     <ns7:srgbClr val="222222"/>
                   </ns7:solidFill>
-                  <ns7:latin typeface="Comic Sans MS"/>
+                  <ns7:latin typeface="Times New Roman"/>
                   <ns7:ea typeface="Times New Roman"/>
                 </ns7:rPr>
                 <ns7:t>Prediction to decision</ns7:t>
@@ -3884,7 +4048,7 @@
                   <ns7:solidFill>
                     <ns7:srgbClr val="222222"/>
                   </ns7:solidFill>
-                  <ns7:latin typeface="Arial"/>
+                  <ns7:latin typeface="Times New Roman"/>
                   <ns7:ea typeface="Times New Roman"/>
                 </ns7:rPr>
                 <ns7:t>Forecast error</ns7:t>
@@ -3897,7 +4061,7 @@
                   <ns8:solidFill>
                     <ns8:srgbClr val="222222"/>
                   </ns8:solidFill>
-                  <ns8:latin typeface="Arial"/>
+                  <ns8:latin typeface="Times New Roman"/>
                   <ns8:ea typeface="Times New Roman"/>
                 </ns8:rPr>
                 <ns8:t>Action utility</ns8:t>
@@ -3966,6 +4130,10 @@
                 <ns4:tailEnd type="triangle" w="med" len="med"/>
               </ns4:ln>
             </p:spPr>
+            <p:txBody xmlns:a="http://schemas.openxmlformats.org/drawingml/2006/main">
+              <a:bodyPr/>
+              <a:p/>
+            </p:txBody>
           </p:sp>
           <p:sp>
             <p:nvSpPr>
@@ -4035,6 +4203,10 @@
                 </ns4:solidFill>
               </ns4:ln>
             </p:spPr>
+            <p:txBody xmlns:a="http://schemas.openxmlformats.org/drawingml/2006/main">
+              <a:bodyPr/>
+              <a:p/>
+            </p:txBody>
           </p:sp>
           <p:sp>
             <p:nvSpPr>
@@ -4065,7 +4237,7 @@
                     <ns7:solidFill>
                       <ns7:srgbClr val="222222"/>
                     </ns7:solidFill>
-                    <ns7:latin typeface="Arial"/>
+                    <ns7:latin typeface="Times New Roman"/>
                     <ns7:ea typeface="Times New Roman"/>
                   </ns7:rPr>
                   <ns7:t>Forecast</ns7:t>
@@ -4124,6 +4296,10 @@
                 </ns1:outerShdw>
               </ns1:effectLst>
             </p:spPr>
+            <p:txBody xmlns:a="http://schemas.openxmlformats.org/drawingml/2006/main">
+              <a:bodyPr/>
+              <a:p/>
+            </p:txBody>
           </p:sp>
           <p:grpSp>
             <p:nvGrpSpPr>
@@ -4220,6 +4396,10 @@
                   </ns4:solidFill>
                 </ns4:ln>
               </p:spPr>
+              <p:txBody xmlns:a="http://schemas.openxmlformats.org/drawingml/2006/main">
+                <a:bodyPr/>
+                <a:p/>
+              </p:txBody>
             </p:sp>
             <p:sp>
               <p:nvSpPr>
@@ -4256,6 +4436,10 @@
                   </ns4:solidFill>
                 </ns4:ln>
               </p:spPr>
+              <p:txBody xmlns:a="http://schemas.openxmlformats.org/drawingml/2006/main">
+                <a:bodyPr/>
+                <a:p/>
+              </p:txBody>
             </p:sp>
             <p:sp>
               <p:nvSpPr>
@@ -4295,6 +4479,10 @@
                   </ns4:solidFill>
                 </ns4:ln>
               </p:spPr>
+              <p:txBody xmlns:a="http://schemas.openxmlformats.org/drawingml/2006/main">
+                <a:bodyPr/>
+                <a:p/>
+              </p:txBody>
             </p:sp>
             <p:sp>
               <p:nvSpPr>
@@ -4331,6 +4519,10 @@
                   </ns4:solidFill>
                 </ns4:ln>
               </p:spPr>
+              <p:txBody xmlns:a="http://schemas.openxmlformats.org/drawingml/2006/main">
+                <a:bodyPr/>
+                <a:p/>
+              </p:txBody>
             </p:sp>
           </p:grpSp>
           <p:sp>
@@ -4362,7 +4554,7 @@
                     <ns7:solidFill>
                       <ns7:srgbClr val="222222"/>
                     </ns7:solidFill>
-                    <ns7:latin typeface="Arial"/>
+                    <ns7:latin typeface="Times New Roman"/>
                     <ns7:ea typeface="Times New Roman"/>
                   </ns7:rPr>
                   <ns7:t>Inventory action</ns7:t>
@@ -4406,6 +4598,10 @@
               </ns4:solidFill>
             </ns4:ln>
           </p:spPr>
+          <p:txBody xmlns:a="http://schemas.openxmlformats.org/drawingml/2006/main">
+            <a:bodyPr/>
+            <a:p/>
+          </p:txBody>
         </p:sp>
         <p:sp>
           <p:nvSpPr>
@@ -4436,7 +4632,7 @@
                   <ns7:solidFill>
                     <ns7:srgbClr val="222222"/>
                   </ns7:solidFill>
-                  <ns7:latin typeface="Arial"/>
+                  <ns7:latin typeface="Times New Roman"/>
                   <ns7:ea typeface="Times New Roman"/>
                 </ns7:rPr>
                 <ns7:t>Match the backbone, information boundary and resource budget</ns7:t>

--- a/artifacts/editorial_accent_20261022/pptx/Figure15_Accent.pptx
+++ b/artifacts/editorial_accent_20261022/pptx/Figure15_Accent.pptx
@@ -1099,7 +1099,7 @@
                   <ns7:solidFill>
                     <ns7:srgbClr val="222222"/>
                   </ns7:solidFill>
-                  <ns7:latin typeface="Times New Roman"/>
+                  <ns7:latin typeface="Comic Sans MS"/>
                   <ns7:ea typeface="Times New Roman"/>
                 </ns7:rPr>
                 <ns7:t>Open question</ns7:t>
@@ -1136,7 +1136,7 @@
                   <ns7:solidFill>
                     <ns7:srgbClr val="222222"/>
                   </ns7:solidFill>
-                  <ns7:latin typeface="Times New Roman"/>
+                  <ns7:latin typeface="Comic Sans MS"/>
                   <ns7:ea typeface="Times New Roman"/>
                 </ns7:rPr>
                 <ns7:t>Controlled comparison</ns7:t>
@@ -1173,7 +1173,7 @@
                   <ns7:solidFill>
                     <ns7:srgbClr val="222222"/>
                   </ns7:solidFill>
-                  <ns7:latin typeface="Times New Roman"/>
+                  <ns7:latin typeface="Comic Sans MS"/>
                   <ns7:ea typeface="Times New Roman"/>
                 </ns7:rPr>
                 <ns7:t>Evidence to record</ns7:t>
@@ -1216,10 +1216,6 @@
               </ns4:solidFill>
             </ns4:ln>
           </p:spPr>
-          <p:txBody xmlns:a="http://schemas.openxmlformats.org/drawingml/2006/main">
-            <a:bodyPr/>
-            <a:p/>
-          </p:txBody>
         </p:sp>
         <p:sp>
           <p:nvSpPr>
@@ -1250,7 +1246,7 @@
                   <ns7:solidFill>
                     <ns7:srgbClr val="222222"/>
                   </ns7:solidFill>
-                  <ns7:latin typeface="Times New Roman"/>
+                  <ns7:latin typeface="Comic Sans MS"/>
                   <ns7:ea typeface="Times New Roman"/>
                 </ns7:rPr>
                 <ns7:t>Perception or execution</ns7:t>
@@ -1287,7 +1283,7 @@
                   <ns7:solidFill>
                     <ns7:srgbClr val="222222"/>
                   </ns7:solidFill>
-                  <ns7:latin typeface="Times New Roman"/>
+                  <ns7:latin typeface="Arial"/>
                   <ns7:ea typeface="Times New Roman"/>
                 </ns7:rPr>
                 <ns7:t>Numerical error</ns7:t>
@@ -1300,7 +1296,7 @@
                   <ns8:solidFill>
                     <ns8:srgbClr val="222222"/>
                   </ns8:solidFill>
-                  <ns8:latin typeface="Times New Roman"/>
+                  <ns8:latin typeface="Arial"/>
                   <ns8:ea typeface="Times New Roman"/>
                 </ns8:rPr>
                 <ns8:t>Execution cost</ns8:t>
@@ -1374,10 +1370,6 @@
                   </ns4:solidFill>
                 </ns4:ln>
               </p:spPr>
-              <p:txBody xmlns:a="http://schemas.openxmlformats.org/drawingml/2006/main">
-                <a:bodyPr/>
-                <a:p/>
-              </p:txBody>
             </p:sp>
             <p:sp>
               <p:nvSpPr>
@@ -1400,10 +1392,6 @@
                   </ns5:solidFill>
                 </ns5:ln>
               </p:spPr>
-              <p:txBody xmlns:a="http://schemas.openxmlformats.org/drawingml/2006/main">
-                <a:bodyPr/>
-                <a:p/>
-              </p:txBody>
             </p:sp>
             <p:sp>
               <p:nvSpPr>
@@ -1440,10 +1428,6 @@
                   </ns4:solidFill>
                 </ns4:ln>
               </p:spPr>
-              <p:txBody xmlns:a="http://schemas.openxmlformats.org/drawingml/2006/main">
-                <a:bodyPr/>
-                <a:p/>
-              </p:txBody>
             </p:sp>
             <p:sp>
               <p:nvSpPr>
@@ -1480,10 +1464,6 @@
                   </ns4:solidFill>
                 </ns4:ln>
               </p:spPr>
-              <p:txBody xmlns:a="http://schemas.openxmlformats.org/drawingml/2006/main">
-                <a:bodyPr/>
-                <a:p/>
-              </p:txBody>
             </p:sp>
             <p:sp>
               <p:nvSpPr>
@@ -1520,10 +1500,6 @@
                   </ns4:solidFill>
                 </ns4:ln>
               </p:spPr>
-              <p:txBody xmlns:a="http://schemas.openxmlformats.org/drawingml/2006/main">
-                <a:bodyPr/>
-                <a:p/>
-              </p:txBody>
             </p:sp>
             <p:sp>
               <p:nvSpPr>
@@ -1560,10 +1536,6 @@
                   </ns4:solidFill>
                 </ns4:ln>
               </p:spPr>
-              <p:txBody xmlns:a="http://schemas.openxmlformats.org/drawingml/2006/main">
-                <a:bodyPr/>
-                <a:p/>
-              </p:txBody>
             </p:sp>
           </p:grpSp>
           <p:sp>
@@ -1595,7 +1567,7 @@
                     <ns7:solidFill>
                       <ns7:srgbClr val="222222"/>
                     </ns7:solidFill>
-                    <ns7:latin typeface="Times New Roman"/>
+                    <ns7:latin typeface="Arial"/>
                     <ns7:ea typeface="Times New Roman"/>
                   </ns7:rPr>
                   <ns7:t>Model judgment</ns7:t>
@@ -1632,7 +1604,7 @@
                     <ns7:solidFill>
                       <ns7:srgbClr val="222222"/>
                     </ns7:solidFill>
-                    <ns7:latin typeface="Times New Roman"/>
+                    <ns7:latin typeface="Arial"/>
                     <ns7:ea typeface="Times New Roman"/>
                   </ns7:rPr>
                   <ns7:t>vs.</ns7:t>
@@ -1675,10 +1647,6 @@
                   </ns5:solidFill>
                 </ns5:ln>
               </p:spPr>
-              <p:txBody xmlns:a="http://schemas.openxmlformats.org/drawingml/2006/main">
-                <a:bodyPr/>
-                <a:p/>
-              </p:txBody>
             </p:sp>
             <p:sp>
               <p:nvSpPr>
@@ -1715,10 +1683,6 @@
                   </ns4:solidFill>
                 </ns4:ln>
               </p:spPr>
-              <p:txBody xmlns:a="http://schemas.openxmlformats.org/drawingml/2006/main">
-                <a:bodyPr/>
-                <a:p/>
-              </p:txBody>
             </p:sp>
             <p:sp>
               <p:nvSpPr>
@@ -1755,10 +1719,6 @@
                   </ns4:solidFill>
                 </ns4:ln>
               </p:spPr>
-              <p:txBody xmlns:a="http://schemas.openxmlformats.org/drawingml/2006/main">
-                <a:bodyPr/>
-                <a:p/>
-              </p:txBody>
             </p:sp>
             <p:sp>
               <p:nvSpPr>
@@ -1795,10 +1755,6 @@
                   </ns4:solidFill>
                 </ns4:ln>
               </p:spPr>
-              <p:txBody xmlns:a="http://schemas.openxmlformats.org/drawingml/2006/main">
-                <a:bodyPr/>
-                <a:p/>
-              </p:txBody>
             </p:sp>
             <p:sp>
               <p:nvSpPr>
@@ -1835,10 +1791,6 @@
                   </ns4:solidFill>
                 </ns4:ln>
               </p:spPr>
-              <p:txBody xmlns:a="http://schemas.openxmlformats.org/drawingml/2006/main">
-                <a:bodyPr/>
-                <a:p/>
-              </p:txBody>
             </p:sp>
             <p:sp>
               <p:nvSpPr>
@@ -1875,10 +1827,6 @@
                   </ns4:solidFill>
                 </ns4:ln>
               </p:spPr>
-              <p:txBody xmlns:a="http://schemas.openxmlformats.org/drawingml/2006/main">
-                <a:bodyPr/>
-                <a:p/>
-              </p:txBody>
             </p:sp>
             <p:sp>
               <p:nvSpPr>
@@ -1915,10 +1863,6 @@
                   </ns4:solidFill>
                 </ns4:ln>
               </p:spPr>
-              <p:txBody xmlns:a="http://schemas.openxmlformats.org/drawingml/2006/main">
-                <a:bodyPr/>
-                <a:p/>
-              </p:txBody>
             </p:sp>
             <p:sp>
               <p:nvSpPr>
@@ -1955,10 +1899,6 @@
                   </ns4:solidFill>
                 </ns4:ln>
               </p:spPr>
-              <p:txBody xmlns:a="http://schemas.openxmlformats.org/drawingml/2006/main">
-                <a:bodyPr/>
-                <a:p/>
-              </p:txBody>
             </p:sp>
             <p:sp>
               <p:nvSpPr>
@@ -1995,10 +1935,6 @@
                   </ns4:solidFill>
                 </ns4:ln>
               </p:spPr>
-              <p:txBody xmlns:a="http://schemas.openxmlformats.org/drawingml/2006/main">
-                <a:bodyPr/>
-                <a:p/>
-              </p:txBody>
             </p:sp>
             <p:sp>
               <p:nvSpPr>
@@ -2035,10 +1971,6 @@
                   </ns4:solidFill>
                 </ns4:ln>
               </p:spPr>
-              <p:txBody xmlns:a="http://schemas.openxmlformats.org/drawingml/2006/main">
-                <a:bodyPr/>
-                <a:p/>
-              </p:txBody>
             </p:sp>
           </p:grpSp>
           <p:sp>
@@ -2070,7 +2002,7 @@
                     <ns7:solidFill>
                       <ns7:srgbClr val="222222"/>
                     </ns7:solidFill>
-                    <ns7:latin typeface="Times New Roman"/>
+                    <ns7:latin typeface="Arial"/>
                     <ns7:ea typeface="Times New Roman"/>
                   </ns7:rPr>
                   <ns7:t>Numerical tool</ns7:t>
@@ -2114,10 +2046,6 @@
               </ns4:solidFill>
             </ns4:ln>
           </p:spPr>
-          <p:txBody xmlns:a="http://schemas.openxmlformats.org/drawingml/2006/main">
-            <a:bodyPr/>
-            <a:p/>
-          </p:txBody>
         </p:sp>
         <p:sp>
           <p:nvSpPr>
@@ -2148,7 +2076,7 @@
                   <ns7:solidFill>
                     <ns7:srgbClr val="222222"/>
                   </ns7:solidFill>
-                  <ns7:latin typeface="Times New Roman"/>
+                  <ns7:latin typeface="Comic Sans MS"/>
                   <ns7:ea typeface="Times New Roman"/>
                 </ns7:rPr>
                 <ns7:t>Memory under change</ns7:t>
@@ -2185,7 +2113,7 @@
                   <ns7:solidFill>
                     <ns7:srgbClr val="222222"/>
                   </ns7:solidFill>
-                  <ns7:latin typeface="Times New Roman"/>
+                  <ns7:latin typeface="Arial"/>
                   <ns7:ea typeface="Times New Roman"/>
                 </ns7:rPr>
                 <ns7:t>Revalidation</ns7:t>
@@ -2198,7 +2126,7 @@
                   <ns8:solidFill>
                     <ns8:srgbClr val="222222"/>
                   </ns8:solidFill>
-                  <ns8:latin typeface="Times New Roman"/>
+                  <ns8:latin typeface="Arial"/>
                   <ns8:ea typeface="Times New Roman"/>
                 </ns8:rPr>
                 <ns8:t>Updated conclusions</ns8:t>
@@ -2258,10 +2186,6 @@
                 </ns0:outerShdw>
               </ns0:effectLst>
             </p:spPr>
-            <p:txBody xmlns:a="http://schemas.openxmlformats.org/drawingml/2006/main">
-              <a:bodyPr/>
-              <a:p/>
-            </p:txBody>
           </p:sp>
           <p:sp>
             <p:nvSpPr>
@@ -2292,7 +2216,7 @@
                     <ns7:solidFill>
                       <ns7:srgbClr val="222222"/>
                     </ns7:solidFill>
-                    <ns7:latin typeface="Times New Roman"/>
+                    <ns7:latin typeface="Arial"/>
                     <ns7:ea typeface="Times New Roman"/>
                   </ns7:rPr>
                   <ns7:t>Release v₁</ns7:t>
@@ -2329,7 +2253,7 @@
                     <ns7:solidFill>
                       <ns7:srgbClr val="222222"/>
                     </ns7:solidFill>
-                    <ns7:latin typeface="Times New Roman"/>
+                    <ns7:latin typeface="Arial"/>
                     <ns7:ea typeface="Times New Roman"/>
                   </ns7:rPr>
                   <ns7:t>Prior evidence</ns7:t>
@@ -2388,10 +2312,6 @@
                 </ns0:outerShdw>
               </ns0:effectLst>
             </p:spPr>
-            <p:txBody xmlns:a="http://schemas.openxmlformats.org/drawingml/2006/main">
-              <a:bodyPr/>
-              <a:p/>
-            </p:txBody>
           </p:sp>
           <p:sp>
             <p:nvSpPr>
@@ -2431,10 +2351,6 @@
                 </ns1:outerShdw>
               </ns1:effectLst>
             </p:spPr>
-            <p:txBody xmlns:a="http://schemas.openxmlformats.org/drawingml/2006/main">
-              <a:bodyPr/>
-              <a:p/>
-            </p:txBody>
           </p:sp>
           <p:sp>
             <p:nvSpPr>
@@ -2465,7 +2381,7 @@
                     <ns7:solidFill>
                       <ns7:srgbClr val="222222"/>
                     </ns7:solidFill>
-                    <ns7:latin typeface="Times New Roman"/>
+                    <ns7:latin typeface="Arial"/>
                     <ns7:ea typeface="Times New Roman"/>
                   </ns7:rPr>
                   <ns7:t>Release v₂</ns7:t>
@@ -2502,7 +2418,7 @@
                     <ns7:solidFill>
                       <ns7:srgbClr val="222222"/>
                     </ns7:solidFill>
-                    <ns7:latin typeface="Times New Roman"/>
+                    <ns7:latin typeface="Arial"/>
                     <ns7:ea typeface="Times New Roman"/>
                   </ns7:rPr>
                   <ns7:t>Revised values</ns7:t>
@@ -2546,10 +2462,6 @@
               </ns4:solidFill>
             </ns4:ln>
           </p:spPr>
-          <p:txBody xmlns:a="http://schemas.openxmlformats.org/drawingml/2006/main">
-            <a:bodyPr/>
-            <a:p/>
-          </p:txBody>
         </p:sp>
         <p:sp>
           <p:nvSpPr>
@@ -2580,7 +2492,7 @@
                   <ns7:solidFill>
                     <ns7:srgbClr val="222222"/>
                   </ns7:solidFill>
-                  <ns7:latin typeface="Times New Roman"/>
+                  <ns7:latin typeface="Comic Sans MS"/>
                   <ns7:ea typeface="Times New Roman"/>
                 </ns7:rPr>
                 <ns7:t>Procedure transfer</ns7:t>
@@ -2617,7 +2529,7 @@
                   <ns7:solidFill>
                     <ns7:srgbClr val="222222"/>
                   </ns7:solidFill>
-                  <ns7:latin typeface="Times New Roman"/>
+                  <ns7:latin typeface="Arial"/>
                   <ns7:ea typeface="Times New Roman"/>
                 </ns7:rPr>
                 <ns7:t>Held-out performance</ns7:t>
@@ -2630,7 +2542,7 @@
                   <ns8:solidFill>
                     <ns8:srgbClr val="222222"/>
                   </ns8:solidFill>
-                  <ns8:latin typeface="Times New Roman"/>
+                  <ns8:latin typeface="Arial"/>
                   <ns8:ea typeface="Times New Roman"/>
                 </ns8:rPr>
                 <ns8:t>Reuse success</ns8:t>
@@ -2699,10 +2611,6 @@
                 <ns4:tailEnd type="triangle" w="med" len="med"/>
               </ns4:ln>
             </p:spPr>
-            <p:txBody xmlns:a="http://schemas.openxmlformats.org/drawingml/2006/main">
-              <a:bodyPr/>
-              <a:p/>
-            </p:txBody>
           </p:sp>
           <p:sp>
             <p:nvSpPr>
@@ -2772,10 +2680,6 @@
                 </ns4:solidFill>
               </ns4:ln>
             </p:spPr>
-            <p:txBody xmlns:a="http://schemas.openxmlformats.org/drawingml/2006/main">
-              <a:bodyPr/>
-              <a:p/>
-            </p:txBody>
           </p:sp>
           <p:sp>
             <p:nvSpPr>
@@ -2806,7 +2710,7 @@
                     <ns7:solidFill>
                       <ns7:srgbClr val="222222"/>
                     </ns7:solidFill>
-                    <ns7:latin typeface="Times New Roman"/>
+                    <ns7:latin typeface="Arial"/>
                     <ns7:ea typeface="Times New Roman"/>
                   </ns7:rPr>
                   <ns7:t>Seen setting</ns7:t>
@@ -2843,7 +2747,7 @@
                     <ns7:solidFill>
                       <ns7:srgbClr val="222222"/>
                     </ns7:solidFill>
-                    <ns7:latin typeface="Times New Roman"/>
+                    <ns7:latin typeface="Arial"/>
                     <ns7:ea typeface="Times New Roman"/>
                   </ns7:rPr>
                   <ns7:t>vs.</ns7:t>
@@ -2898,10 +2802,6 @@
                 <ns4:tailEnd type="triangle" w="med" len="med"/>
               </ns4:ln>
             </p:spPr>
-            <p:txBody xmlns:a="http://schemas.openxmlformats.org/drawingml/2006/main">
-              <a:bodyPr/>
-              <a:p/>
-            </p:txBody>
           </p:sp>
           <p:sp>
             <p:nvSpPr>
@@ -2971,10 +2871,6 @@
                 </ns4:solidFill>
               </ns4:ln>
             </p:spPr>
-            <p:txBody xmlns:a="http://schemas.openxmlformats.org/drawingml/2006/main">
-              <a:bodyPr/>
-              <a:p/>
-            </p:txBody>
           </p:sp>
           <p:sp>
             <p:nvSpPr>
@@ -3005,7 +2901,7 @@
                     <ns7:solidFill>
                       <ns7:srgbClr val="222222"/>
                     </ns7:solidFill>
-                    <ns7:latin typeface="Times New Roman"/>
+                    <ns7:latin typeface="Arial"/>
                     <ns7:ea typeface="Times New Roman"/>
                   </ns7:rPr>
                   <ns7:t>Held-out setting</ns7:t>
@@ -3049,10 +2945,6 @@
               </ns4:solidFill>
             </ns4:ln>
           </p:spPr>
-          <p:txBody xmlns:a="http://schemas.openxmlformats.org/drawingml/2006/main">
-            <a:bodyPr/>
-            <a:p/>
-          </p:txBody>
         </p:sp>
         <p:sp>
           <p:nvSpPr>
@@ -3083,7 +2975,7 @@
                   <ns7:solidFill>
                     <ns7:srgbClr val="222222"/>
                   </ns7:solidFill>
-                  <ns7:latin typeface="Times New Roman"/>
+                  <ns7:latin typeface="Comic Sans MS"/>
                   <ns7:ea typeface="Times New Roman"/>
                 </ns7:rPr>
                 <ns7:t>Evidence sensitivity</ns7:t>
@@ -3120,7 +3012,7 @@
                   <ns7:solidFill>
                     <ns7:srgbClr val="222222"/>
                   </ns7:solidFill>
-                  <ns7:latin typeface="Times New Roman"/>
+                  <ns7:latin typeface="Arial"/>
                   <ns7:ea typeface="Times New Roman"/>
                 </ns7:rPr>
                 <ns7:t>Response to removal</ns7:t>
@@ -3133,7 +3025,7 @@
                   <ns8:solidFill>
                     <ns8:srgbClr val="222222"/>
                   </ns8:solidFill>
-                  <ns8:latin typeface="Times New Roman"/>
+                  <ns8:latin typeface="Arial"/>
                   <ns8:ea typeface="Times New Roman"/>
                 </ns8:rPr>
                 <ns8:t>Grounded claims</ns8:t>
@@ -3242,10 +3134,6 @@
                   </ns4:solidFill>
                 </ns4:ln>
               </p:spPr>
-              <p:txBody xmlns:a="http://schemas.openxmlformats.org/drawingml/2006/main">
-                <a:bodyPr/>
-                <a:p/>
-              </p:txBody>
             </p:sp>
             <p:sp>
               <p:nvSpPr>
@@ -3290,10 +3178,6 @@
                   </ns4:solidFill>
                 </ns4:ln>
               </p:spPr>
-              <p:txBody xmlns:a="http://schemas.openxmlformats.org/drawingml/2006/main">
-                <a:bodyPr/>
-                <a:p/>
-              </p:txBody>
             </p:sp>
             <p:sp>
               <p:nvSpPr>
@@ -3330,10 +3214,6 @@
                   </ns4:solidFill>
                 </ns4:ln>
               </p:spPr>
-              <p:txBody xmlns:a="http://schemas.openxmlformats.org/drawingml/2006/main">
-                <a:bodyPr/>
-                <a:p/>
-              </p:txBody>
             </p:sp>
             <p:sp>
               <p:nvSpPr>
@@ -3370,10 +3250,6 @@
                   </ns4:solidFill>
                 </ns4:ln>
               </p:spPr>
-              <p:txBody xmlns:a="http://schemas.openxmlformats.org/drawingml/2006/main">
-                <a:bodyPr/>
-                <a:p/>
-              </p:txBody>
             </p:sp>
             <p:sp>
               <p:nvSpPr>
@@ -3410,10 +3286,6 @@
                   </ns4:solidFill>
                 </ns4:ln>
               </p:spPr>
-              <p:txBody xmlns:a="http://schemas.openxmlformats.org/drawingml/2006/main">
-                <a:bodyPr/>
-                <a:p/>
-              </p:txBody>
             </p:sp>
           </p:grpSp>
           <p:grpSp>
@@ -3468,10 +3340,6 @@
                   </ns4:solidFill>
                 </ns4:ln>
               </p:spPr>
-              <p:txBody xmlns:a="http://schemas.openxmlformats.org/drawingml/2006/main">
-                <a:bodyPr/>
-                <a:p/>
-              </p:txBody>
             </p:sp>
           </p:grpSp>
           <p:sp>
@@ -3503,7 +3371,7 @@
                     <ns7:solidFill>
                       <ns7:srgbClr val="222222"/>
                     </ns7:solidFill>
-                    <ns7:latin typeface="Times New Roman"/>
+                    <ns7:latin typeface="Arial"/>
                     <ns7:ea typeface="Times New Roman"/>
                   </ns7:rPr>
                   <ns7:t>Evidence present</ns7:t>
@@ -3540,7 +3408,7 @@
                     <ns7:solidFill>
                       <ns7:srgbClr val="222222"/>
                     </ns7:solidFill>
-                    <ns7:latin typeface="Times New Roman"/>
+                    <ns7:latin typeface="Arial"/>
                     <ns7:ea typeface="Times New Roman"/>
                   </ns7:rPr>
                   <ns7:t>vs.</ns7:t>
@@ -3635,10 +3503,6 @@
                   </ns4:solidFill>
                 </ns4:ln>
               </p:spPr>
-              <p:txBody xmlns:a="http://schemas.openxmlformats.org/drawingml/2006/main">
-                <a:bodyPr/>
-                <a:p/>
-              </p:txBody>
             </p:sp>
             <p:sp>
               <p:nvSpPr>
@@ -3683,10 +3547,6 @@
                   </ns4:solidFill>
                 </ns4:ln>
               </p:spPr>
-              <p:txBody xmlns:a="http://schemas.openxmlformats.org/drawingml/2006/main">
-                <a:bodyPr/>
-                <a:p/>
-              </p:txBody>
             </p:sp>
             <p:sp>
               <p:nvSpPr>
@@ -3723,10 +3583,6 @@
                   </ns4:solidFill>
                 </ns4:ln>
               </p:spPr>
-              <p:txBody xmlns:a="http://schemas.openxmlformats.org/drawingml/2006/main">
-                <a:bodyPr/>
-                <a:p/>
-              </p:txBody>
             </p:sp>
             <p:sp>
               <p:nvSpPr>
@@ -3763,10 +3619,6 @@
                   </ns4:solidFill>
                 </ns4:ln>
               </p:spPr>
-              <p:txBody xmlns:a="http://schemas.openxmlformats.org/drawingml/2006/main">
-                <a:bodyPr/>
-                <a:p/>
-              </p:txBody>
             </p:sp>
             <p:sp>
               <p:nvSpPr>
@@ -3803,10 +3655,6 @@
                   </ns4:solidFill>
                 </ns4:ln>
               </p:spPr>
-              <p:txBody xmlns:a="http://schemas.openxmlformats.org/drawingml/2006/main">
-                <a:bodyPr/>
-                <a:p/>
-              </p:txBody>
             </p:sp>
           </p:grpSp>
           <p:grpSp>
@@ -3858,10 +3706,6 @@
                   </ns4:solidFill>
                 </ns4:ln>
               </p:spPr>
-              <p:txBody xmlns:a="http://schemas.openxmlformats.org/drawingml/2006/main">
-                <a:bodyPr/>
-                <a:p/>
-              </p:txBody>
             </p:sp>
             <p:sp>
               <p:nvSpPr>
@@ -3898,10 +3742,6 @@
                   </ns4:solidFill>
                 </ns4:ln>
               </p:spPr>
-              <p:txBody xmlns:a="http://schemas.openxmlformats.org/drawingml/2006/main">
-                <a:bodyPr/>
-                <a:p/>
-              </p:txBody>
             </p:sp>
           </p:grpSp>
           <p:sp>
@@ -3933,7 +3773,7 @@
                     <ns7:solidFill>
                       <ns7:srgbClr val="222222"/>
                     </ns7:solidFill>
-                    <ns7:latin typeface="Times New Roman"/>
+                    <ns7:latin typeface="Arial"/>
                     <ns7:ea typeface="Times New Roman"/>
                   </ns7:rPr>
                   <ns7:t>Evidence removed</ns7:t>
@@ -3977,10 +3817,6 @@
               </ns4:solidFill>
             </ns4:ln>
           </p:spPr>
-          <p:txBody xmlns:a="http://schemas.openxmlformats.org/drawingml/2006/main">
-            <a:bodyPr/>
-            <a:p/>
-          </p:txBody>
         </p:sp>
         <p:sp>
           <p:nvSpPr>
@@ -4011,7 +3847,7 @@
                   <ns7:solidFill>
                     <ns7:srgbClr val="222222"/>
                   </ns7:solidFill>
-                  <ns7:latin typeface="Times New Roman"/>
+                  <ns7:latin typeface="Comic Sans MS"/>
                   <ns7:ea typeface="Times New Roman"/>
                 </ns7:rPr>
                 <ns7:t>Prediction to decision</ns7:t>
@@ -4048,7 +3884,7 @@
                   <ns7:solidFill>
                     <ns7:srgbClr val="222222"/>
                   </ns7:solidFill>
-                  <ns7:latin typeface="Times New Roman"/>
+                  <ns7:latin typeface="Arial"/>
                   <ns7:ea typeface="Times New Roman"/>
                 </ns7:rPr>
                 <ns7:t>Forecast error</ns7:t>
@@ -4061,7 +3897,7 @@
                   <ns8:solidFill>
                     <ns8:srgbClr val="222222"/>
                   </ns8:solidFill>
-                  <ns8:latin typeface="Times New Roman"/>
+                  <ns8:latin typeface="Arial"/>
                   <ns8:ea typeface="Times New Roman"/>
                 </ns8:rPr>
                 <ns8:t>Action utility</ns8:t>
@@ -4130,10 +3966,6 @@
                 <ns4:tailEnd type="triangle" w="med" len="med"/>
               </ns4:ln>
             </p:spPr>
-            <p:txBody xmlns:a="http://schemas.openxmlformats.org/drawingml/2006/main">
-              <a:bodyPr/>
-              <a:p/>
-            </p:txBody>
           </p:sp>
           <p:sp>
             <p:nvSpPr>
@@ -4203,10 +4035,6 @@
                 </ns4:solidFill>
               </ns4:ln>
             </p:spPr>
-            <p:txBody xmlns:a="http://schemas.openxmlformats.org/drawingml/2006/main">
-              <a:bodyPr/>
-              <a:p/>
-            </p:txBody>
           </p:sp>
           <p:sp>
             <p:nvSpPr>
@@ -4237,7 +4065,7 @@
                     <ns7:solidFill>
                       <ns7:srgbClr val="222222"/>
                     </ns7:solidFill>
-                    <ns7:latin typeface="Times New Roman"/>
+                    <ns7:latin typeface="Arial"/>
                     <ns7:ea typeface="Times New Roman"/>
                   </ns7:rPr>
                   <ns7:t>Forecast</ns7:t>
@@ -4296,10 +4124,6 @@
                 </ns1:outerShdw>
               </ns1:effectLst>
             </p:spPr>
-            <p:txBody xmlns:a="http://schemas.openxmlformats.org/drawingml/2006/main">
-              <a:bodyPr/>
-              <a:p/>
-            </p:txBody>
           </p:sp>
           <p:grpSp>
             <p:nvGrpSpPr>
@@ -4396,10 +4220,6 @@
                   </ns4:solidFill>
                 </ns4:ln>
               </p:spPr>
-              <p:txBody xmlns:a="http://schemas.openxmlformats.org/drawingml/2006/main">
-                <a:bodyPr/>
-                <a:p/>
-              </p:txBody>
             </p:sp>
             <p:sp>
               <p:nvSpPr>
@@ -4436,10 +4256,6 @@
                   </ns4:solidFill>
                 </ns4:ln>
               </p:spPr>
-              <p:txBody xmlns:a="http://schemas.openxmlformats.org/drawingml/2006/main">
-                <a:bodyPr/>
-                <a:p/>
-              </p:txBody>
             </p:sp>
             <p:sp>
               <p:nvSpPr>
@@ -4479,10 +4295,6 @@
                   </ns4:solidFill>
                 </ns4:ln>
               </p:spPr>
-              <p:txBody xmlns:a="http://schemas.openxmlformats.org/drawingml/2006/main">
-                <a:bodyPr/>
-                <a:p/>
-              </p:txBody>
             </p:sp>
             <p:sp>
               <p:nvSpPr>
@@ -4519,10 +4331,6 @@
                   </ns4:solidFill>
                 </ns4:ln>
               </p:spPr>
-              <p:txBody xmlns:a="http://schemas.openxmlformats.org/drawingml/2006/main">
-                <a:bodyPr/>
-                <a:p/>
-              </p:txBody>
             </p:sp>
           </p:grpSp>
           <p:sp>
@@ -4554,7 +4362,7 @@
                     <ns7:solidFill>
                       <ns7:srgbClr val="222222"/>
                     </ns7:solidFill>
-                    <ns7:latin typeface="Times New Roman"/>
+                    <ns7:latin typeface="Arial"/>
                     <ns7:ea typeface="Times New Roman"/>
                   </ns7:rPr>
                   <ns7:t>Inventory action</ns7:t>
@@ -4598,10 +4406,6 @@
               </ns4:solidFill>
             </ns4:ln>
           </p:spPr>
-          <p:txBody xmlns:a="http://schemas.openxmlformats.org/drawingml/2006/main">
-            <a:bodyPr/>
-            <a:p/>
-          </p:txBody>
         </p:sp>
         <p:sp>
           <p:nvSpPr>
@@ -4632,7 +4436,7 @@
                   <ns7:solidFill>
                     <ns7:srgbClr val="222222"/>
                   </ns7:solidFill>
-                  <ns7:latin typeface="Times New Roman"/>
+                  <ns7:latin typeface="Arial"/>
                   <ns7:ea typeface="Times New Roman"/>
                 </ns7:rPr>
                 <ns7:t>Match the backbone, information boundary and resource budget</ns7:t>
